--- a/20260825_human-digital-mfg/slides.pptx
+++ b/20260825_human-digital-mfg/slides.pptx
@@ -3624,7 +3624,7 @@
           </a:solidFill>
           <a:ln w="19050">
             <a:solidFill>
-              <a:srgbClr val="3D3D3A"/>
+              <a:srgbClr val="6A9BCC"/>
             </a:solidFill>
           </a:ln>
         </p:spPr>
@@ -3648,6 +3648,222 @@
         <p:spPr>
           <a:xfrm>
             <a:off x="5086350" y="2599283"/>
+            <a:ext cx="1714500" cy="476250"/>
+          </a:xfrm>
+          <a:prstGeom prst="roundRect">
+            <a:avLst>
+              <a:gd name="adj" fmla="val 12000"/>
+            </a:avLst>
+          </a:prstGeom>
+          <a:solidFill>
+            <a:srgbClr val="232321"/>
+          </a:solidFill>
+          <a:ln w="19050">
+            <a:solidFill>
+              <a:srgbClr val="6A9BCC"/>
+            </a:solidFill>
+          </a:ln>
+        </p:spPr>
+        <p:txBody>
+          <a:bodyPr wrap="none" lIns="0" tIns="0" rIns="0" bIns="0" rtlCol="0" anchor="ctr"/>
+          <a:lstStyle/>
+          <a:p>
+            <a:pPr indent="0" marL="0">
+              <a:buNone/>
+            </a:pPr>
+            <a:endParaRPr lang="en-US" dirty="0"/>
+          </a:p>
+        </p:txBody>
+      </p:sp>
+      <p:sp>
+        <p:nvSpPr>
+          <p:cNvPr id="5" name="Text 3"/>
+          <p:cNvSpPr/>
+          <p:nvPr/>
+        </p:nvSpPr>
+        <p:spPr>
+          <a:xfrm>
+            <a:off x="5086350" y="3208883"/>
+            <a:ext cx="1714500" cy="476250"/>
+          </a:xfrm>
+          <a:prstGeom prst="roundRect">
+            <a:avLst>
+              <a:gd name="adj" fmla="val 12000"/>
+            </a:avLst>
+          </a:prstGeom>
+          <a:solidFill>
+            <a:srgbClr val="232321"/>
+          </a:solidFill>
+          <a:ln w="19050">
+            <a:solidFill>
+              <a:srgbClr val="6A9BCC"/>
+            </a:solidFill>
+          </a:ln>
+        </p:spPr>
+        <p:txBody>
+          <a:bodyPr wrap="none" lIns="0" tIns="0" rIns="0" bIns="0" rtlCol="0" anchor="ctr"/>
+          <a:lstStyle/>
+          <a:p>
+            <a:pPr indent="0" marL="0">
+              <a:buNone/>
+            </a:pPr>
+            <a:endParaRPr lang="en-US" dirty="0"/>
+          </a:p>
+        </p:txBody>
+      </p:sp>
+      <p:sp>
+        <p:nvSpPr>
+          <p:cNvPr id="6" name="Text 4"/>
+          <p:cNvSpPr/>
+          <p:nvPr/>
+        </p:nvSpPr>
+        <p:spPr>
+          <a:xfrm>
+            <a:off x="2990850" y="3818483"/>
+            <a:ext cx="1714500" cy="476250"/>
+          </a:xfrm>
+          <a:prstGeom prst="roundRect">
+            <a:avLst>
+              <a:gd name="adj" fmla="val 12000"/>
+            </a:avLst>
+          </a:prstGeom>
+          <a:solidFill>
+            <a:srgbClr val="232321"/>
+          </a:solidFill>
+          <a:ln w="19050">
+            <a:solidFill>
+              <a:srgbClr val="788C5D"/>
+            </a:solidFill>
+          </a:ln>
+        </p:spPr>
+        <p:txBody>
+          <a:bodyPr wrap="none" lIns="0" tIns="0" rIns="0" bIns="0" rtlCol="0" anchor="ctr"/>
+          <a:lstStyle/>
+          <a:p>
+            <a:pPr indent="0" marL="0">
+              <a:buNone/>
+            </a:pPr>
+            <a:endParaRPr lang="en-US" dirty="0"/>
+          </a:p>
+        </p:txBody>
+      </p:sp>
+      <p:sp>
+        <p:nvSpPr>
+          <p:cNvPr id="7" name="Text 5"/>
+          <p:cNvSpPr/>
+          <p:nvPr/>
+        </p:nvSpPr>
+        <p:spPr>
+          <a:xfrm>
+            <a:off x="5086350" y="3818483"/>
+            <a:ext cx="1714500" cy="476250"/>
+          </a:xfrm>
+          <a:prstGeom prst="roundRect">
+            <a:avLst>
+              <a:gd name="adj" fmla="val 12000"/>
+            </a:avLst>
+          </a:prstGeom>
+          <a:solidFill>
+            <a:srgbClr val="3D2A22"/>
+          </a:solidFill>
+          <a:ln w="28575">
+            <a:solidFill>
+              <a:srgbClr val="D97757"/>
+            </a:solidFill>
+          </a:ln>
+        </p:spPr>
+        <p:txBody>
+          <a:bodyPr wrap="none" lIns="0" tIns="0" rIns="0" bIns="0" rtlCol="0" anchor="ctr"/>
+          <a:lstStyle/>
+          <a:p>
+            <a:pPr indent="0" marL="0">
+              <a:buNone/>
+            </a:pPr>
+            <a:endParaRPr lang="en-US" dirty="0"/>
+          </a:p>
+        </p:txBody>
+      </p:sp>
+      <p:sp>
+        <p:nvSpPr>
+          <p:cNvPr id="8" name="Text 6"/>
+          <p:cNvSpPr/>
+          <p:nvPr/>
+        </p:nvSpPr>
+        <p:spPr>
+          <a:xfrm>
+            <a:off x="7181850" y="3818483"/>
+            <a:ext cx="1714500" cy="476250"/>
+          </a:xfrm>
+          <a:prstGeom prst="roundRect">
+            <a:avLst>
+              <a:gd name="adj" fmla="val 12000"/>
+            </a:avLst>
+          </a:prstGeom>
+          <a:solidFill>
+            <a:srgbClr val="232321"/>
+          </a:solidFill>
+          <a:ln w="19050">
+            <a:solidFill>
+              <a:srgbClr val="788C5D"/>
+            </a:solidFill>
+          </a:ln>
+        </p:spPr>
+        <p:txBody>
+          <a:bodyPr wrap="none" lIns="0" tIns="0" rIns="0" bIns="0" rtlCol="0" anchor="ctr"/>
+          <a:lstStyle/>
+          <a:p>
+            <a:pPr indent="0" marL="0">
+              <a:buNone/>
+            </a:pPr>
+            <a:endParaRPr lang="en-US" dirty="0"/>
+          </a:p>
+        </p:txBody>
+      </p:sp>
+      <p:sp>
+        <p:nvSpPr>
+          <p:cNvPr id="9" name="Text 7"/>
+          <p:cNvSpPr/>
+          <p:nvPr/>
+        </p:nvSpPr>
+        <p:spPr>
+          <a:xfrm>
+            <a:off x="9277350" y="3818483"/>
+            <a:ext cx="1714500" cy="476250"/>
+          </a:xfrm>
+          <a:prstGeom prst="roundRect">
+            <a:avLst>
+              <a:gd name="adj" fmla="val 12000"/>
+            </a:avLst>
+          </a:prstGeom>
+          <a:solidFill>
+            <a:srgbClr val="232321"/>
+          </a:solidFill>
+          <a:ln w="19050">
+            <a:solidFill>
+              <a:srgbClr val="788C5D"/>
+            </a:solidFill>
+          </a:ln>
+        </p:spPr>
+        <p:txBody>
+          <a:bodyPr wrap="none" lIns="0" tIns="0" rIns="0" bIns="0" rtlCol="0" anchor="ctr"/>
+          <a:lstStyle/>
+          <a:p>
+            <a:pPr indent="0" marL="0">
+              <a:buNone/>
+            </a:pPr>
+            <a:endParaRPr lang="en-US" dirty="0"/>
+          </a:p>
+        </p:txBody>
+      </p:sp>
+      <p:sp>
+        <p:nvSpPr>
+          <p:cNvPr id="10" name="Text 8"/>
+          <p:cNvSpPr/>
+          <p:nvPr/>
+        </p:nvSpPr>
+        <p:spPr>
+          <a:xfrm>
+            <a:off x="5086350" y="4428083"/>
             <a:ext cx="1714500" cy="476250"/>
           </a:xfrm>
           <a:prstGeom prst="roundRect">
@@ -3677,237 +3893,21 @@
       </p:sp>
       <p:sp>
         <p:nvSpPr>
-          <p:cNvPr id="5" name="Text 3"/>
+          <p:cNvPr id="11" name="Text 9"/>
           <p:cNvSpPr/>
           <p:nvPr/>
         </p:nvSpPr>
         <p:spPr>
           <a:xfrm>
-            <a:off x="5086350" y="3208883"/>
-            <a:ext cx="1714500" cy="476250"/>
-          </a:xfrm>
-          <a:prstGeom prst="roundRect">
-            <a:avLst>
-              <a:gd name="adj" fmla="val 12000"/>
-            </a:avLst>
+            <a:off x="609600" y="5261521"/>
+            <a:ext cx="10972800" cy="409575"/>
+          </a:xfrm>
+          <a:prstGeom prst="rect">
+            <a:avLst/>
           </a:prstGeom>
           <a:solidFill>
             <a:srgbClr val="232321"/>
           </a:solidFill>
-          <a:ln w="19050">
-            <a:solidFill>
-              <a:srgbClr val="3D3D3A"/>
-            </a:solidFill>
-          </a:ln>
-        </p:spPr>
-        <p:txBody>
-          <a:bodyPr wrap="none" lIns="0" tIns="0" rIns="0" bIns="0" rtlCol="0" anchor="ctr"/>
-          <a:lstStyle/>
-          <a:p>
-            <a:pPr indent="0" marL="0">
-              <a:buNone/>
-            </a:pPr>
-            <a:endParaRPr lang="en-US" dirty="0"/>
-          </a:p>
-        </p:txBody>
-      </p:sp>
-      <p:sp>
-        <p:nvSpPr>
-          <p:cNvPr id="6" name="Text 4"/>
-          <p:cNvSpPr/>
-          <p:nvPr/>
-        </p:nvSpPr>
-        <p:spPr>
-          <a:xfrm>
-            <a:off x="2990850" y="3818483"/>
-            <a:ext cx="1714500" cy="476250"/>
-          </a:xfrm>
-          <a:prstGeom prst="roundRect">
-            <a:avLst>
-              <a:gd name="adj" fmla="val 12000"/>
-            </a:avLst>
-          </a:prstGeom>
-          <a:solidFill>
-            <a:srgbClr val="232321"/>
-          </a:solidFill>
-          <a:ln w="19050">
-            <a:solidFill>
-              <a:srgbClr val="3D3D3A"/>
-            </a:solidFill>
-          </a:ln>
-        </p:spPr>
-        <p:txBody>
-          <a:bodyPr wrap="none" lIns="0" tIns="0" rIns="0" bIns="0" rtlCol="0" anchor="ctr"/>
-          <a:lstStyle/>
-          <a:p>
-            <a:pPr indent="0" marL="0">
-              <a:buNone/>
-            </a:pPr>
-            <a:endParaRPr lang="en-US" dirty="0"/>
-          </a:p>
-        </p:txBody>
-      </p:sp>
-      <p:sp>
-        <p:nvSpPr>
-          <p:cNvPr id="7" name="Text 5"/>
-          <p:cNvSpPr/>
-          <p:nvPr/>
-        </p:nvSpPr>
-        <p:spPr>
-          <a:xfrm>
-            <a:off x="5086350" y="3818483"/>
-            <a:ext cx="1714500" cy="476250"/>
-          </a:xfrm>
-          <a:prstGeom prst="roundRect">
-            <a:avLst>
-              <a:gd name="adj" fmla="val 12000"/>
-            </a:avLst>
-          </a:prstGeom>
-          <a:solidFill>
-            <a:srgbClr val="3D2A22"/>
-          </a:solidFill>
-          <a:ln w="28575">
-            <a:solidFill>
-              <a:srgbClr val="D97757"/>
-            </a:solidFill>
-          </a:ln>
-        </p:spPr>
-        <p:txBody>
-          <a:bodyPr wrap="none" lIns="0" tIns="0" rIns="0" bIns="0" rtlCol="0" anchor="ctr"/>
-          <a:lstStyle/>
-          <a:p>
-            <a:pPr indent="0" marL="0">
-              <a:buNone/>
-            </a:pPr>
-            <a:endParaRPr lang="en-US" dirty="0"/>
-          </a:p>
-        </p:txBody>
-      </p:sp>
-      <p:sp>
-        <p:nvSpPr>
-          <p:cNvPr id="8" name="Text 6"/>
-          <p:cNvSpPr/>
-          <p:nvPr/>
-        </p:nvSpPr>
-        <p:spPr>
-          <a:xfrm>
-            <a:off x="7181850" y="3818483"/>
-            <a:ext cx="1714500" cy="476250"/>
-          </a:xfrm>
-          <a:prstGeom prst="roundRect">
-            <a:avLst>
-              <a:gd name="adj" fmla="val 12000"/>
-            </a:avLst>
-          </a:prstGeom>
-          <a:solidFill>
-            <a:srgbClr val="232321"/>
-          </a:solidFill>
-          <a:ln w="19050">
-            <a:solidFill>
-              <a:srgbClr val="3D3D3A"/>
-            </a:solidFill>
-          </a:ln>
-        </p:spPr>
-        <p:txBody>
-          <a:bodyPr wrap="none" lIns="0" tIns="0" rIns="0" bIns="0" rtlCol="0" anchor="ctr"/>
-          <a:lstStyle/>
-          <a:p>
-            <a:pPr indent="0" marL="0">
-              <a:buNone/>
-            </a:pPr>
-            <a:endParaRPr lang="en-US" dirty="0"/>
-          </a:p>
-        </p:txBody>
-      </p:sp>
-      <p:sp>
-        <p:nvSpPr>
-          <p:cNvPr id="9" name="Text 7"/>
-          <p:cNvSpPr/>
-          <p:nvPr/>
-        </p:nvSpPr>
-        <p:spPr>
-          <a:xfrm>
-            <a:off x="9277350" y="3818483"/>
-            <a:ext cx="1714500" cy="476250"/>
-          </a:xfrm>
-          <a:prstGeom prst="roundRect">
-            <a:avLst>
-              <a:gd name="adj" fmla="val 12000"/>
-            </a:avLst>
-          </a:prstGeom>
-          <a:solidFill>
-            <a:srgbClr val="232321"/>
-          </a:solidFill>
-          <a:ln w="19050">
-            <a:solidFill>
-              <a:srgbClr val="3D3D3A"/>
-            </a:solidFill>
-          </a:ln>
-        </p:spPr>
-        <p:txBody>
-          <a:bodyPr wrap="none" lIns="0" tIns="0" rIns="0" bIns="0" rtlCol="0" anchor="ctr"/>
-          <a:lstStyle/>
-          <a:p>
-            <a:pPr indent="0" marL="0">
-              <a:buNone/>
-            </a:pPr>
-            <a:endParaRPr lang="en-US" dirty="0"/>
-          </a:p>
-        </p:txBody>
-      </p:sp>
-      <p:sp>
-        <p:nvSpPr>
-          <p:cNvPr id="10" name="Text 8"/>
-          <p:cNvSpPr/>
-          <p:nvPr/>
-        </p:nvSpPr>
-        <p:spPr>
-          <a:xfrm>
-            <a:off x="5086350" y="4428083"/>
-            <a:ext cx="1714500" cy="476250"/>
-          </a:xfrm>
-          <a:prstGeom prst="roundRect">
-            <a:avLst>
-              <a:gd name="adj" fmla="val 12000"/>
-            </a:avLst>
-          </a:prstGeom>
-          <a:solidFill>
-            <a:srgbClr val="232321"/>
-          </a:solidFill>
-          <a:ln w="19050">
-            <a:solidFill>
-              <a:srgbClr val="3D3D3A"/>
-            </a:solidFill>
-          </a:ln>
-        </p:spPr>
-        <p:txBody>
-          <a:bodyPr wrap="none" lIns="0" tIns="0" rIns="0" bIns="0" rtlCol="0" anchor="ctr"/>
-          <a:lstStyle/>
-          <a:p>
-            <a:pPr indent="0" marL="0">
-              <a:buNone/>
-            </a:pPr>
-            <a:endParaRPr lang="en-US" dirty="0"/>
-          </a:p>
-        </p:txBody>
-      </p:sp>
-      <p:sp>
-        <p:nvSpPr>
-          <p:cNvPr id="11" name="Text 9"/>
-          <p:cNvSpPr/>
-          <p:nvPr/>
-        </p:nvSpPr>
-        <p:spPr>
-          <a:xfrm>
-            <a:off x="609600" y="5261521"/>
-            <a:ext cx="10972800" cy="409575"/>
-          </a:xfrm>
-          <a:prstGeom prst="rect">
-            <a:avLst/>
-          </a:prstGeom>
-          <a:solidFill>
-            <a:srgbClr val="232321"/>
-          </a:solidFill>
           <a:ln/>
         </p:spPr>
         <p:txBody>
@@ -4134,7 +4134,7 @@
             <a:r>
               <a:rPr lang="en-US" sz="1800" b="1" dirty="0">
                 <a:solidFill>
-                  <a:srgbClr val="B0AEA5"/>
+                  <a:srgbClr val="6A9BCC"/>
                 </a:solidFill>
                 <a:latin typeface="Noto Sans JP" pitchFamily="34" charset="0"/>
                 <a:ea typeface="Noto Sans JP" pitchFamily="34" charset="-122"/>
@@ -4251,7 +4251,7 @@
             <a:r>
               <a:rPr lang="en-US" sz="1800" b="1" dirty="0">
                 <a:solidFill>
-                  <a:srgbClr val="B0AEA5"/>
+                  <a:srgbClr val="6A9BCC"/>
                 </a:solidFill>
                 <a:latin typeface="Noto Sans JP" pitchFamily="34" charset="0"/>
                 <a:ea typeface="Noto Sans JP" pitchFamily="34" charset="-122"/>
@@ -4368,7 +4368,7 @@
             <a:r>
               <a:rPr lang="en-US" sz="1800" b="1" dirty="0">
                 <a:solidFill>
-                  <a:srgbClr val="B0AEA5"/>
+                  <a:srgbClr val="6A9BCC"/>
                 </a:solidFill>
                 <a:latin typeface="Noto Sans JP" pitchFamily="34" charset="0"/>
                 <a:ea typeface="Noto Sans JP" pitchFamily="34" charset="-122"/>
@@ -4485,7 +4485,7 @@
             <a:r>
               <a:rPr lang="en-US" sz="1800" b="1" dirty="0">
                 <a:solidFill>
-                  <a:srgbClr val="B0AEA5"/>
+                  <a:srgbClr val="788C5D"/>
                 </a:solidFill>
                 <a:latin typeface="Noto Sans JP" pitchFamily="34" charset="0"/>
                 <a:ea typeface="Noto Sans JP" pitchFamily="34" charset="-122"/>
@@ -4602,7 +4602,7 @@
             <a:r>
               <a:rPr lang="en-US" sz="1800" b="1" dirty="0">
                 <a:solidFill>
-                  <a:srgbClr val="B0AEA5"/>
+                  <a:srgbClr val="788C5D"/>
                 </a:solidFill>
                 <a:latin typeface="Noto Sans JP" pitchFamily="34" charset="0"/>
                 <a:ea typeface="Noto Sans JP" pitchFamily="34" charset="-122"/>
@@ -4719,7 +4719,7 @@
             <a:r>
               <a:rPr lang="en-US" sz="1800" b="1" dirty="0">
                 <a:solidFill>
-                  <a:srgbClr val="B0AEA5"/>
+                  <a:srgbClr val="788C5D"/>
                 </a:solidFill>
                 <a:latin typeface="Noto Sans JP" pitchFamily="34" charset="0"/>
                 <a:ea typeface="Noto Sans JP" pitchFamily="34" charset="-122"/>

--- a/20260825_human-digital-mfg/slides.pptx
+++ b/20260825_human-digital-mfg/slides.pptx
@@ -12145,38 +12145,6 @@
         </p:nvSpPr>
         <p:spPr>
           <a:xfrm>
-            <a:off x="933450" y="2313533"/>
-            <a:ext cx="2857500" cy="214313"/>
-          </a:xfrm>
-          <a:prstGeom prst="roundRect">
-            <a:avLst>
-              <a:gd name="adj" fmla="val 50000"/>
-            </a:avLst>
-          </a:prstGeom>
-          <a:solidFill>
-            <a:srgbClr val="D97757"/>
-          </a:solidFill>
-          <a:ln/>
-        </p:spPr>
-        <p:txBody>
-          <a:bodyPr wrap="none" lIns="0" tIns="0" rIns="0" bIns="0" rtlCol="0" anchor="ctr"/>
-          <a:lstStyle/>
-          <a:p>
-            <a:pPr indent="0" marL="0">
-              <a:buNone/>
-            </a:pPr>
-            <a:endParaRPr lang="en-US" dirty="0"/>
-          </a:p>
-        </p:txBody>
-      </p:sp>
-      <p:sp>
-        <p:nvSpPr>
-          <p:cNvPr id="5" name="Text 3"/>
-          <p:cNvSpPr/>
-          <p:nvPr/>
-        </p:nvSpPr>
-        <p:spPr>
-          <a:xfrm>
             <a:off x="4343400" y="1989683"/>
             <a:ext cx="3505200" cy="2429470"/>
           </a:xfrm>
@@ -12207,39 +12175,7 @@
       </p:sp>
       <p:sp>
         <p:nvSpPr>
-          <p:cNvPr id="6" name="Text 4"/>
-          <p:cNvSpPr/>
-          <p:nvPr/>
-        </p:nvSpPr>
-        <p:spPr>
-          <a:xfrm>
-            <a:off x="4667250" y="2313533"/>
-            <a:ext cx="2857500" cy="214313"/>
-          </a:xfrm>
-          <a:prstGeom prst="roundRect">
-            <a:avLst>
-              <a:gd name="adj" fmla="val 50000"/>
-            </a:avLst>
-          </a:prstGeom>
-          <a:solidFill>
-            <a:srgbClr val="6A9BCC"/>
-          </a:solidFill>
-          <a:ln/>
-        </p:spPr>
-        <p:txBody>
-          <a:bodyPr wrap="none" lIns="0" tIns="0" rIns="0" bIns="0" rtlCol="0" anchor="ctr"/>
-          <a:lstStyle/>
-          <a:p>
-            <a:pPr indent="0" marL="0">
-              <a:buNone/>
-            </a:pPr>
-            <a:endParaRPr lang="en-US" dirty="0"/>
-          </a:p>
-        </p:txBody>
-      </p:sp>
-      <p:sp>
-        <p:nvSpPr>
-          <p:cNvPr id="7" name="Text 5"/>
+          <p:cNvPr id="5" name="Text 3"/>
           <p:cNvSpPr/>
           <p:nvPr/>
         </p:nvSpPr>
@@ -12275,39 +12211,7 @@
       </p:sp>
       <p:sp>
         <p:nvSpPr>
-          <p:cNvPr id="8" name="Text 6"/>
-          <p:cNvSpPr/>
-          <p:nvPr/>
-        </p:nvSpPr>
-        <p:spPr>
-          <a:xfrm>
-            <a:off x="8401050" y="2313533"/>
-            <a:ext cx="2857500" cy="214313"/>
-          </a:xfrm>
-          <a:prstGeom prst="roundRect">
-            <a:avLst>
-              <a:gd name="adj" fmla="val 50000"/>
-            </a:avLst>
-          </a:prstGeom>
-          <a:solidFill>
-            <a:srgbClr val="788C5D"/>
-          </a:solidFill>
-          <a:ln/>
-        </p:spPr>
-        <p:txBody>
-          <a:bodyPr wrap="none" lIns="0" tIns="0" rIns="0" bIns="0" rtlCol="0" anchor="ctr"/>
-          <a:lstStyle/>
-          <a:p>
-            <a:pPr indent="0" marL="0">
-              <a:buNone/>
-            </a:pPr>
-            <a:endParaRPr lang="en-US" dirty="0"/>
-          </a:p>
-        </p:txBody>
-      </p:sp>
-      <p:sp>
-        <p:nvSpPr>
-          <p:cNvPr id="9" name="Text 7"/>
+          <p:cNvPr id="6" name="Text 4"/>
           <p:cNvSpPr/>
           <p:nvPr/>
         </p:nvSpPr>
@@ -12343,7 +12247,7 @@
       </p:sp>
       <p:sp>
         <p:nvSpPr>
-          <p:cNvPr id="10" name="Text 8"/>
+          <p:cNvPr id="7" name="Text 5"/>
           <p:cNvSpPr txBox="1"/>
           <p:nvPr/>
         </p:nvSpPr>
@@ -12382,7 +12286,7 @@
       </p:sp>
       <p:sp>
         <p:nvSpPr>
-          <p:cNvPr id="11" name="Text 9"/>
+          <p:cNvPr id="8" name="Text 6"/>
           <p:cNvSpPr txBox="1"/>
           <p:nvPr/>
         </p:nvSpPr>
@@ -12421,7 +12325,7 @@
       </p:sp>
       <p:sp>
         <p:nvSpPr>
-          <p:cNvPr id="12" name="Text 10"/>
+          <p:cNvPr id="9" name="Text 7"/>
           <p:cNvSpPr txBox="1"/>
           <p:nvPr/>
         </p:nvSpPr>
@@ -12460,7 +12364,7 @@
       </p:sp>
       <p:sp>
         <p:nvSpPr>
-          <p:cNvPr id="13" name="Text 11"/>
+          <p:cNvPr id="10" name="Text 8"/>
           <p:cNvSpPr txBox="1"/>
           <p:nvPr/>
         </p:nvSpPr>
@@ -12499,7 +12403,7 @@
       </p:sp>
       <p:sp>
         <p:nvSpPr>
-          <p:cNvPr id="14" name="Text 12"/>
+          <p:cNvPr id="11" name="Text 9"/>
           <p:cNvSpPr txBox="1"/>
           <p:nvPr/>
         </p:nvSpPr>
@@ -12538,7 +12442,7 @@
       </p:sp>
       <p:sp>
         <p:nvSpPr>
-          <p:cNvPr id="15" name="Text 13"/>
+          <p:cNvPr id="12" name="Text 10"/>
           <p:cNvSpPr txBox="1"/>
           <p:nvPr/>
         </p:nvSpPr>
@@ -12577,7 +12481,7 @@
       </p:sp>
       <p:sp>
         <p:nvSpPr>
-          <p:cNvPr id="16" name="Text 14"/>
+          <p:cNvPr id="13" name="Text 11"/>
           <p:cNvSpPr txBox="1"/>
           <p:nvPr/>
         </p:nvSpPr>
@@ -12616,7 +12520,7 @@
       </p:sp>
       <p:sp>
         <p:nvSpPr>
-          <p:cNvPr id="17" name="Text 15"/>
+          <p:cNvPr id="14" name="Text 12"/>
           <p:cNvSpPr txBox="1"/>
           <p:nvPr/>
         </p:nvSpPr>
@@ -12655,7 +12559,7 @@
       </p:sp>
       <p:sp>
         <p:nvSpPr>
-          <p:cNvPr id="18" name="Text 16"/>
+          <p:cNvPr id="15" name="Text 13"/>
           <p:cNvSpPr txBox="1"/>
           <p:nvPr/>
         </p:nvSpPr>
@@ -12694,7 +12598,7 @@
       </p:sp>
       <p:sp>
         <p:nvSpPr>
-          <p:cNvPr id="19" name="Text 17"/>
+          <p:cNvPr id="16" name="Text 14"/>
           <p:cNvSpPr txBox="1"/>
           <p:nvPr/>
         </p:nvSpPr>
@@ -12733,7 +12637,7 @@
       </p:sp>
       <p:sp>
         <p:nvSpPr>
-          <p:cNvPr id="20" name="Text 18"/>
+          <p:cNvPr id="17" name="Text 15"/>
           <p:cNvSpPr txBox="1"/>
           <p:nvPr/>
         </p:nvSpPr>
@@ -12772,7 +12676,7 @@
       </p:sp>
       <p:sp>
         <p:nvSpPr>
-          <p:cNvPr id="21" name="Text 19"/>
+          <p:cNvPr id="18" name="Text 16"/>
           <p:cNvSpPr txBox="1"/>
           <p:nvPr/>
         </p:nvSpPr>
@@ -12811,7 +12715,7 @@
       </p:sp>
       <p:sp>
         <p:nvSpPr>
-          <p:cNvPr id="22" name="Text 20"/>
+          <p:cNvPr id="19" name="Text 17"/>
           <p:cNvSpPr txBox="1"/>
           <p:nvPr/>
         </p:nvSpPr>
@@ -12850,7 +12754,7 @@
       </p:sp>
       <p:sp>
         <p:nvSpPr>
-          <p:cNvPr id="23" name="Text 21"/>
+          <p:cNvPr id="20" name="Text 18"/>
           <p:cNvSpPr txBox="1"/>
           <p:nvPr/>
         </p:nvSpPr>
@@ -12889,7 +12793,7 @@
       </p:sp>
       <p:sp>
         <p:nvSpPr>
-          <p:cNvPr id="24" name="Text 22"/>
+          <p:cNvPr id="21" name="Text 19"/>
           <p:cNvSpPr txBox="1"/>
           <p:nvPr/>
         </p:nvSpPr>
@@ -12928,7 +12832,7 @@
       </p:sp>
       <p:sp>
         <p:nvSpPr>
-          <p:cNvPr id="25" name="Text 23"/>
+          <p:cNvPr id="22" name="Text 20"/>
           <p:cNvSpPr txBox="1"/>
           <p:nvPr/>
         </p:nvSpPr>
@@ -12967,7 +12871,7 @@
       </p:sp>
       <p:sp>
         <p:nvSpPr>
-          <p:cNvPr id="26" name="Text 24"/>
+          <p:cNvPr id="23" name="Text 21"/>
           <p:cNvSpPr txBox="1"/>
           <p:nvPr/>
         </p:nvSpPr>

--- a/20260825_human-digital-mfg/slides.pptx
+++ b/20260825_human-digital-mfg/slides.pptx
@@ -3878,6 +3878,7 @@
             <a:solidFill>
               <a:srgbClr val="3D3D3A"/>
             </a:solidFill>
+            <a:prstDash val="dash"/>
           </a:ln>
         </p:spPr>
         <p:txBody>
@@ -5796,18 +5797,19 @@
         </p:nvSpPr>
         <p:spPr>
           <a:xfrm>
-            <a:off x="609600" y="1989683"/>
-            <a:ext cx="2133600" cy="400050"/>
+            <a:off x="595313" y="1975396"/>
+            <a:ext cx="2162175" cy="428625"/>
           </a:xfrm>
           <a:prstGeom prst="roundRect">
             <a:avLst>
               <a:gd name="adj" fmla="val 50000"/>
             </a:avLst>
           </a:prstGeom>
-          <a:solidFill>
-            <a:srgbClr val="D97757"/>
-          </a:solidFill>
-          <a:ln/>
+          <a:ln w="28575">
+            <a:solidFill>
+              <a:srgbClr val="D97757"/>
+            </a:solidFill>
+          </a:ln>
         </p:spPr>
         <p:txBody>
           <a:bodyPr wrap="none" lIns="0" tIns="0" rIns="0" bIns="0" rtlCol="0" anchor="ctr"/>
@@ -5828,7 +5830,7 @@
         </p:nvSpPr>
         <p:spPr>
           <a:xfrm>
-            <a:off x="2819400" y="1989683"/>
+            <a:off x="609600" y="1989683"/>
             <a:ext cx="2133600" cy="400050"/>
           </a:xfrm>
           <a:prstGeom prst="roundRect">
@@ -5837,7 +5839,7 @@
             </a:avLst>
           </a:prstGeom>
           <a:solidFill>
-            <a:srgbClr val="6A9BCC"/>
+            <a:srgbClr val="D97757"/>
           </a:solidFill>
           <a:ln/>
         </p:spPr>
@@ -5860,7 +5862,7 @@
         </p:nvSpPr>
         <p:spPr>
           <a:xfrm>
-            <a:off x="5029200" y="1989683"/>
+            <a:off x="2819400" y="1989683"/>
             <a:ext cx="2133600" cy="400050"/>
           </a:xfrm>
           <a:prstGeom prst="roundRect">
@@ -5869,7 +5871,9 @@
             </a:avLst>
           </a:prstGeom>
           <a:solidFill>
-            <a:srgbClr val="788C5D"/>
+            <a:srgbClr val="6A9BCC">
+              <a:alpha val="40000"/>
+            </a:srgbClr>
           </a:solidFill>
           <a:ln/>
         </p:spPr>
@@ -5892,7 +5896,7 @@
         </p:nvSpPr>
         <p:spPr>
           <a:xfrm>
-            <a:off x="7239000" y="1989683"/>
+            <a:off x="5029200" y="1989683"/>
             <a:ext cx="2133600" cy="400050"/>
           </a:xfrm>
           <a:prstGeom prst="roundRect">
@@ -5901,7 +5905,9 @@
             </a:avLst>
           </a:prstGeom>
           <a:solidFill>
-            <a:srgbClr val="9C7FB5"/>
+            <a:srgbClr val="788C5D">
+              <a:alpha val="40000"/>
+            </a:srgbClr>
           </a:solidFill>
           <a:ln/>
         </p:spPr>
@@ -5924,7 +5930,7 @@
         </p:nvSpPr>
         <p:spPr>
           <a:xfrm>
-            <a:off x="9448800" y="1989683"/>
+            <a:off x="7239000" y="1989683"/>
             <a:ext cx="2133600" cy="400050"/>
           </a:xfrm>
           <a:prstGeom prst="roundRect">
@@ -5933,7 +5939,9 @@
             </a:avLst>
           </a:prstGeom>
           <a:solidFill>
-            <a:srgbClr val="D97757"/>
+            <a:srgbClr val="9C7FB5">
+              <a:alpha val="40000"/>
+            </a:srgbClr>
           </a:solidFill>
           <a:ln/>
         </p:spPr>
@@ -5951,6 +5959,40 @@
       <p:sp>
         <p:nvSpPr>
           <p:cNvPr id="8" name="Text 6"/>
+          <p:cNvSpPr/>
+          <p:nvPr/>
+        </p:nvSpPr>
+        <p:spPr>
+          <a:xfrm>
+            <a:off x="9448800" y="1989683"/>
+            <a:ext cx="2133600" cy="400050"/>
+          </a:xfrm>
+          <a:prstGeom prst="roundRect">
+            <a:avLst>
+              <a:gd name="adj" fmla="val 50000"/>
+            </a:avLst>
+          </a:prstGeom>
+          <a:solidFill>
+            <a:srgbClr val="D97757">
+              <a:alpha val="40000"/>
+            </a:srgbClr>
+          </a:solidFill>
+          <a:ln/>
+        </p:spPr>
+        <p:txBody>
+          <a:bodyPr wrap="none" lIns="0" tIns="0" rIns="0" bIns="0" rtlCol="0" anchor="ctr"/>
+          <a:lstStyle/>
+          <a:p>
+            <a:pPr indent="0" marL="0">
+              <a:buNone/>
+            </a:pPr>
+            <a:endParaRPr lang="en-US" dirty="0"/>
+          </a:p>
+        </p:txBody>
+      </p:sp>
+      <p:sp>
+        <p:nvSpPr>
+          <p:cNvPr id="9" name="Text 7"/>
           <p:cNvSpPr/>
           <p:nvPr/>
         </p:nvSpPr>
@@ -5986,7 +6028,7 @@
       </p:sp>
       <p:sp>
         <p:nvSpPr>
-          <p:cNvPr id="9" name="Text 7"/>
+          <p:cNvPr id="10" name="Text 8"/>
           <p:cNvSpPr/>
           <p:nvPr/>
         </p:nvSpPr>
@@ -6022,7 +6064,7 @@
       </p:sp>
       <p:sp>
         <p:nvSpPr>
-          <p:cNvPr id="10" name="Text 8"/>
+          <p:cNvPr id="11" name="Text 9"/>
           <p:cNvSpPr/>
           <p:nvPr/>
         </p:nvSpPr>
@@ -6058,7 +6100,7 @@
       </p:sp>
       <p:sp>
         <p:nvSpPr>
-          <p:cNvPr id="11" name="Text 9"/>
+          <p:cNvPr id="12" name="Text 10"/>
           <p:cNvSpPr/>
           <p:nvPr/>
         </p:nvSpPr>
@@ -6088,7 +6130,7 @@
       </p:sp>
       <p:sp>
         <p:nvSpPr>
-          <p:cNvPr id="12" name="Text 10"/>
+          <p:cNvPr id="13" name="Text 11"/>
           <p:cNvSpPr/>
           <p:nvPr/>
         </p:nvSpPr>
@@ -6118,7 +6160,7 @@
       </p:sp>
       <p:sp>
         <p:nvSpPr>
-          <p:cNvPr id="13" name="Text 11"/>
+          <p:cNvPr id="14" name="Text 12"/>
           <p:cNvSpPr/>
           <p:nvPr/>
         </p:nvSpPr>
@@ -6148,7 +6190,7 @@
       </p:sp>
       <p:sp>
         <p:nvSpPr>
-          <p:cNvPr id="14" name="Text 12"/>
+          <p:cNvPr id="15" name="Text 13"/>
           <p:cNvSpPr/>
           <p:nvPr/>
         </p:nvSpPr>
@@ -6178,7 +6220,7 @@
       </p:sp>
       <p:sp>
         <p:nvSpPr>
-          <p:cNvPr id="15" name="Text 13"/>
+          <p:cNvPr id="16" name="Text 14"/>
           <p:cNvSpPr/>
           <p:nvPr/>
         </p:nvSpPr>
@@ -6208,7 +6250,7 @@
       </p:sp>
       <p:sp>
         <p:nvSpPr>
-          <p:cNvPr id="16" name="Text 14"/>
+          <p:cNvPr id="17" name="Text 15"/>
           <p:cNvSpPr/>
           <p:nvPr/>
         </p:nvSpPr>
@@ -6238,7 +6280,7 @@
       </p:sp>
       <p:sp>
         <p:nvSpPr>
-          <p:cNvPr id="17" name="Text 15"/>
+          <p:cNvPr id="18" name="Text 16"/>
           <p:cNvSpPr/>
           <p:nvPr/>
         </p:nvSpPr>
@@ -6274,7 +6316,7 @@
       </p:sp>
       <p:sp>
         <p:nvSpPr>
-          <p:cNvPr id="18" name="Text 16"/>
+          <p:cNvPr id="19" name="Text 17"/>
           <p:cNvSpPr/>
           <p:nvPr/>
         </p:nvSpPr>
@@ -6310,7 +6352,7 @@
       </p:sp>
       <p:sp>
         <p:nvSpPr>
-          <p:cNvPr id="19" name="Text 17"/>
+          <p:cNvPr id="20" name="Text 18"/>
           <p:cNvSpPr/>
           <p:nvPr/>
         </p:nvSpPr>
@@ -6346,7 +6388,7 @@
       </p:sp>
       <p:sp>
         <p:nvSpPr>
-          <p:cNvPr id="20" name="Text 18"/>
+          <p:cNvPr id="21" name="Text 19"/>
           <p:cNvSpPr/>
           <p:nvPr/>
         </p:nvSpPr>
@@ -6382,7 +6424,7 @@
       </p:sp>
       <p:pic>
         <p:nvPicPr>
-          <p:cNvPr id="21" name="Image 0" descr="preencoded.png">    </p:cNvPr>
+          <p:cNvPr id="22" name="Image 0" descr="preencoded.png">    </p:cNvPr>
           <p:cNvPicPr>
             <a:picLocks noChangeAspect="1"/>
           </p:cNvPicPr>
@@ -6406,7 +6448,7 @@
       </p:pic>
       <p:sp>
         <p:nvSpPr>
-          <p:cNvPr id="22" name="Text 19"/>
+          <p:cNvPr id="23" name="Text 20"/>
           <p:cNvSpPr txBox="1"/>
           <p:nvPr/>
         </p:nvSpPr>
@@ -6445,7 +6487,7 @@
       </p:sp>
       <p:sp>
         <p:nvSpPr>
-          <p:cNvPr id="23" name="Text 20"/>
+          <p:cNvPr id="24" name="Text 21"/>
           <p:cNvSpPr txBox="1"/>
           <p:nvPr/>
         </p:nvSpPr>
@@ -6484,7 +6526,7 @@
       </p:sp>
       <p:sp>
         <p:nvSpPr>
-          <p:cNvPr id="24" name="Text 21"/>
+          <p:cNvPr id="25" name="Text 22"/>
           <p:cNvSpPr txBox="1"/>
           <p:nvPr/>
         </p:nvSpPr>
@@ -6523,7 +6565,7 @@
       </p:sp>
       <p:sp>
         <p:nvSpPr>
-          <p:cNvPr id="25" name="Text 22"/>
+          <p:cNvPr id="26" name="Text 23"/>
           <p:cNvSpPr txBox="1"/>
           <p:nvPr/>
         </p:nvSpPr>
@@ -6548,7 +6590,7 @@
             <a:r>
               <a:rPr lang="en-US" sz="1650" b="1" dirty="0">
                 <a:solidFill>
-                  <a:srgbClr val="FAF9F5"/>
+                  <a:srgbClr val="70706D"/>
                 </a:solidFill>
                 <a:latin typeface="Noto Sans JP" pitchFamily="34" charset="0"/>
                 <a:ea typeface="Noto Sans JP" pitchFamily="34" charset="-122"/>
@@ -6562,7 +6604,7 @@
       </p:sp>
       <p:sp>
         <p:nvSpPr>
-          <p:cNvPr id="26" name="Text 23"/>
+          <p:cNvPr id="27" name="Text 24"/>
           <p:cNvSpPr txBox="1"/>
           <p:nvPr/>
         </p:nvSpPr>
@@ -6587,7 +6629,7 @@
             <a:r>
               <a:rPr lang="en-US" sz="1650" b="1" dirty="0">
                 <a:solidFill>
-                  <a:srgbClr val="FAF9F5"/>
+                  <a:srgbClr val="70706D"/>
                 </a:solidFill>
                 <a:latin typeface="Noto Sans JP" pitchFamily="34" charset="0"/>
                 <a:ea typeface="Noto Sans JP" pitchFamily="34" charset="-122"/>
@@ -6601,7 +6643,7 @@
       </p:sp>
       <p:sp>
         <p:nvSpPr>
-          <p:cNvPr id="27" name="Text 24"/>
+          <p:cNvPr id="28" name="Text 25"/>
           <p:cNvSpPr txBox="1"/>
           <p:nvPr/>
         </p:nvSpPr>
@@ -6626,7 +6668,7 @@
             <a:r>
               <a:rPr lang="en-US" sz="1650" b="1" dirty="0">
                 <a:solidFill>
-                  <a:srgbClr val="FAF9F5"/>
+                  <a:srgbClr val="70706D"/>
                 </a:solidFill>
                 <a:latin typeface="Noto Sans JP" pitchFamily="34" charset="0"/>
                 <a:ea typeface="Noto Sans JP" pitchFamily="34" charset="-122"/>
@@ -6640,7 +6682,7 @@
       </p:sp>
       <p:sp>
         <p:nvSpPr>
-          <p:cNvPr id="28" name="Text 25"/>
+          <p:cNvPr id="29" name="Text 26"/>
           <p:cNvSpPr txBox="1"/>
           <p:nvPr/>
         </p:nvSpPr>
@@ -6665,7 +6707,7 @@
             <a:r>
               <a:rPr lang="en-US" sz="1650" b="1" dirty="0">
                 <a:solidFill>
-                  <a:srgbClr val="FAF9F5"/>
+                  <a:srgbClr val="70706D"/>
                 </a:solidFill>
                 <a:latin typeface="Noto Sans JP" pitchFamily="34" charset="0"/>
                 <a:ea typeface="Noto Sans JP" pitchFamily="34" charset="-122"/>
@@ -6679,7 +6721,7 @@
       </p:sp>
       <p:sp>
         <p:nvSpPr>
-          <p:cNvPr id="29" name="Text 26"/>
+          <p:cNvPr id="30" name="Text 27"/>
           <p:cNvSpPr txBox="1"/>
           <p:nvPr/>
         </p:nvSpPr>
@@ -6718,7 +6760,7 @@
       </p:sp>
       <p:sp>
         <p:nvSpPr>
-          <p:cNvPr id="30" name="Text 27"/>
+          <p:cNvPr id="31" name="Text 28"/>
           <p:cNvSpPr txBox="1"/>
           <p:nvPr/>
         </p:nvSpPr>
@@ -6757,7 +6799,7 @@
       </p:sp>
       <p:sp>
         <p:nvSpPr>
-          <p:cNvPr id="31" name="Text 28"/>
+          <p:cNvPr id="32" name="Text 29"/>
           <p:cNvSpPr txBox="1"/>
           <p:nvPr/>
         </p:nvSpPr>
@@ -6796,7 +6838,7 @@
       </p:sp>
       <p:sp>
         <p:nvSpPr>
-          <p:cNvPr id="32" name="Text 29"/>
+          <p:cNvPr id="33" name="Text 30"/>
           <p:cNvSpPr txBox="1"/>
           <p:nvPr/>
         </p:nvSpPr>
@@ -6835,7 +6877,7 @@
       </p:sp>
       <p:sp>
         <p:nvSpPr>
-          <p:cNvPr id="33" name="Text 30"/>
+          <p:cNvPr id="34" name="Text 31"/>
           <p:cNvSpPr txBox="1"/>
           <p:nvPr/>
         </p:nvSpPr>
@@ -6874,7 +6916,7 @@
       </p:sp>
       <p:sp>
         <p:nvSpPr>
-          <p:cNvPr id="34" name="Text 31"/>
+          <p:cNvPr id="35" name="Text 32"/>
           <p:cNvSpPr txBox="1"/>
           <p:nvPr/>
         </p:nvSpPr>
@@ -6913,7 +6955,7 @@
       </p:sp>
       <p:sp>
         <p:nvSpPr>
-          <p:cNvPr id="35" name="Text 32"/>
+          <p:cNvPr id="36" name="Text 33"/>
           <p:cNvSpPr txBox="1"/>
           <p:nvPr/>
         </p:nvSpPr>
@@ -6952,7 +6994,7 @@
       </p:sp>
       <p:sp>
         <p:nvSpPr>
-          <p:cNvPr id="36" name="Text 33"/>
+          <p:cNvPr id="37" name="Text 34"/>
           <p:cNvSpPr txBox="1"/>
           <p:nvPr/>
         </p:nvSpPr>
@@ -6991,7 +7033,7 @@
       </p:sp>
       <p:sp>
         <p:nvSpPr>
-          <p:cNvPr id="37" name="Text 34"/>
+          <p:cNvPr id="38" name="Text 35"/>
           <p:cNvSpPr txBox="1"/>
           <p:nvPr/>
         </p:nvSpPr>
@@ -7030,7 +7072,7 @@
       </p:sp>
       <p:sp>
         <p:nvSpPr>
-          <p:cNvPr id="38" name="Text 35"/>
+          <p:cNvPr id="39" name="Text 36"/>
           <p:cNvSpPr txBox="1"/>
           <p:nvPr/>
         </p:nvSpPr>
@@ -7069,7 +7111,7 @@
       </p:sp>
       <p:sp>
         <p:nvSpPr>
-          <p:cNvPr id="39" name="Text 36"/>
+          <p:cNvPr id="40" name="Text 37"/>
           <p:cNvSpPr txBox="1"/>
           <p:nvPr/>
         </p:nvSpPr>
@@ -7108,7 +7150,7 @@
       </p:sp>
       <p:sp>
         <p:nvSpPr>
-          <p:cNvPr id="40" name="Text 37"/>
+          <p:cNvPr id="41" name="Text 38"/>
           <p:cNvSpPr txBox="1"/>
           <p:nvPr/>
         </p:nvSpPr>
@@ -7147,7 +7189,7 @@
       </p:sp>
       <p:sp>
         <p:nvSpPr>
-          <p:cNvPr id="41" name="Text 38"/>
+          <p:cNvPr id="42" name="Text 39"/>
           <p:cNvSpPr txBox="1"/>
           <p:nvPr/>
         </p:nvSpPr>
@@ -7186,7 +7228,7 @@
       </p:sp>
       <p:sp>
         <p:nvSpPr>
-          <p:cNvPr id="42" name="Text 39"/>
+          <p:cNvPr id="43" name="Text 40"/>
           <p:cNvSpPr txBox="1"/>
           <p:nvPr/>
         </p:nvSpPr>
@@ -7225,7 +7267,7 @@
       </p:sp>
       <p:sp>
         <p:nvSpPr>
-          <p:cNvPr id="43" name="Text 40"/>
+          <p:cNvPr id="44" name="Text 41"/>
           <p:cNvSpPr txBox="1"/>
           <p:nvPr/>
         </p:nvSpPr>
@@ -7264,7 +7306,7 @@
       </p:sp>
       <p:sp>
         <p:nvSpPr>
-          <p:cNvPr id="44" name="Text 41"/>
+          <p:cNvPr id="45" name="Text 42"/>
           <p:cNvSpPr txBox="1"/>
           <p:nvPr/>
         </p:nvSpPr>
@@ -7303,7 +7345,7 @@
       </p:sp>
       <p:sp>
         <p:nvSpPr>
-          <p:cNvPr id="45" name="Text 42"/>
+          <p:cNvPr id="46" name="Text 43"/>
           <p:cNvSpPr txBox="1"/>
           <p:nvPr/>
         </p:nvSpPr>
@@ -7342,7 +7384,7 @@
       </p:sp>
       <p:sp>
         <p:nvSpPr>
-          <p:cNvPr id="46" name="Text 43"/>
+          <p:cNvPr id="47" name="Text 44"/>
           <p:cNvSpPr txBox="1"/>
           <p:nvPr/>
         </p:nvSpPr>
@@ -7381,7 +7423,7 @@
       </p:sp>
       <p:sp>
         <p:nvSpPr>
-          <p:cNvPr id="47" name="Text 44"/>
+          <p:cNvPr id="48" name="Text 45"/>
           <p:cNvSpPr txBox="1"/>
           <p:nvPr/>
         </p:nvSpPr>
@@ -7420,7 +7462,7 @@
       </p:sp>
       <p:sp>
         <p:nvSpPr>
-          <p:cNvPr id="48" name="Text 45"/>
+          <p:cNvPr id="49" name="Text 46"/>
           <p:cNvSpPr txBox="1"/>
           <p:nvPr/>
         </p:nvSpPr>
@@ -7459,7 +7501,7 @@
       </p:sp>
       <p:sp>
         <p:nvSpPr>
-          <p:cNvPr id="49" name="Text 46"/>
+          <p:cNvPr id="50" name="Text 47"/>
           <p:cNvSpPr txBox="1"/>
           <p:nvPr/>
         </p:nvSpPr>
@@ -7498,7 +7540,7 @@
       </p:sp>
       <p:sp>
         <p:nvSpPr>
-          <p:cNvPr id="50" name="Text 47"/>
+          <p:cNvPr id="51" name="Text 48"/>
           <p:cNvSpPr txBox="1"/>
           <p:nvPr/>
         </p:nvSpPr>
@@ -7537,7 +7579,7 @@
       </p:sp>
       <p:sp>
         <p:nvSpPr>
-          <p:cNvPr id="51" name="Text 48"/>
+          <p:cNvPr id="52" name="Text 49"/>
           <p:cNvSpPr txBox="1"/>
           <p:nvPr/>
         </p:nvSpPr>
@@ -7576,7 +7618,7 @@
       </p:sp>
       <p:sp>
         <p:nvSpPr>
-          <p:cNvPr id="52" name="Text 49"/>
+          <p:cNvPr id="53" name="Text 50"/>
           <p:cNvSpPr txBox="1"/>
           <p:nvPr/>
         </p:nvSpPr>
@@ -7615,7 +7657,7 @@
       </p:sp>
       <p:sp>
         <p:nvSpPr>
-          <p:cNvPr id="53" name="Text 50"/>
+          <p:cNvPr id="54" name="Text 51"/>
           <p:cNvSpPr txBox="1"/>
           <p:nvPr/>
         </p:nvSpPr>
@@ -7654,7 +7696,7 @@
       </p:sp>
       <p:sp>
         <p:nvSpPr>
-          <p:cNvPr id="54" name="Text 51"/>
+          <p:cNvPr id="55" name="Text 52"/>
           <p:cNvSpPr txBox="1"/>
           <p:nvPr/>
         </p:nvSpPr>
@@ -7721,7 +7763,7 @@
       </p:sp>
       <p:sp>
         <p:nvSpPr>
-          <p:cNvPr id="55" name="Text 52"/>
+          <p:cNvPr id="56" name="Text 53"/>
           <p:cNvSpPr txBox="1"/>
           <p:nvPr/>
         </p:nvSpPr>
@@ -7879,6 +7921,7 @@
             <a:solidFill>
               <a:srgbClr val="3D3D3A"/>
             </a:solidFill>
+            <a:prstDash val="dash"/>
           </a:ln>
         </p:spPr>
         <p:txBody>
@@ -7915,6 +7958,7 @@
             <a:solidFill>
               <a:srgbClr val="3D3D3A"/>
             </a:solidFill>
+            <a:prstDash val="dash"/>
           </a:ln>
         </p:spPr>
         <p:txBody>
@@ -7951,6 +7995,7 @@
             <a:solidFill>
               <a:srgbClr val="3D3D3A"/>
             </a:solidFill>
+            <a:prstDash val="dash"/>
           </a:ln>
         </p:spPr>
         <p:txBody>
@@ -8023,6 +8068,7 @@
             <a:solidFill>
               <a:srgbClr val="3D3D3A"/>
             </a:solidFill>
+            <a:prstDash val="dash"/>
           </a:ln>
         </p:spPr>
         <p:txBody>
@@ -8059,6 +8105,7 @@
             <a:solidFill>
               <a:srgbClr val="3D3D3A"/>
             </a:solidFill>
+            <a:prstDash val="dash"/>
           </a:ln>
         </p:spPr>
         <p:txBody>
@@ -8095,6 +8142,7 @@
             <a:solidFill>
               <a:srgbClr val="3D3D3A"/>
             </a:solidFill>
+            <a:prstDash val="dash"/>
           </a:ln>
         </p:spPr>
         <p:txBody>
@@ -8131,6 +8179,7 @@
             <a:solidFill>
               <a:srgbClr val="3D3D3A"/>
             </a:solidFill>
+            <a:prstDash val="dash"/>
           </a:ln>
         </p:spPr>
         <p:txBody>
@@ -8347,6 +8396,7 @@
             <a:solidFill>
               <a:srgbClr val="3D3D3A"/>
             </a:solidFill>
+            <a:prstDash val="dash"/>
           </a:ln>
         </p:spPr>
         <p:txBody>
@@ -8383,6 +8433,7 @@
             <a:solidFill>
               <a:srgbClr val="3D3D3A"/>
             </a:solidFill>
+            <a:prstDash val="dash"/>
           </a:ln>
         </p:spPr>
         <p:txBody>
@@ -8419,6 +8470,7 @@
             <a:solidFill>
               <a:srgbClr val="3D3D3A"/>
             </a:solidFill>
+            <a:prstDash val="dash"/>
           </a:ln>
         </p:spPr>
         <p:txBody>
@@ -9640,6 +9692,7 @@
             <a:solidFill>
               <a:srgbClr val="3D3D3A"/>
             </a:solidFill>
+            <a:prstDash val="dash"/>
           </a:ln>
         </p:spPr>
         <p:txBody>
@@ -11305,6 +11358,7 @@
             <a:solidFill>
               <a:srgbClr val="3D3D3A"/>
             </a:solidFill>
+            <a:prstDash val="dash"/>
           </a:ln>
         </p:spPr>
         <p:txBody>
@@ -11831,6 +11885,7 @@
             <a:solidFill>
               <a:srgbClr val="3D3D3A"/>
             </a:solidFill>
+            <a:prstDash val="dash"/>
           </a:ln>
         </p:spPr>
         <p:txBody>
